--- a/Rapport de PROJET/Présentation de Projet.pptx
+++ b/Rapport de PROJET/Présentation de Projet.pptx
@@ -5,16 +5,18 @@
     <p:sldMasterId id="2147483648" r:id="rId4"/>
   </p:sldMasterIdLst>
   <p:notesMasterIdLst>
-    <p:notesMasterId r:id="rId9"/>
+    <p:notesMasterId r:id="rId11"/>
   </p:notesMasterIdLst>
   <p:handoutMasterIdLst>
-    <p:handoutMasterId r:id="rId10"/>
+    <p:handoutMasterId r:id="rId12"/>
   </p:handoutMasterIdLst>
   <p:sldIdLst>
     <p:sldId id="256" r:id="rId5"/>
     <p:sldId id="257" r:id="rId6"/>
     <p:sldId id="260" r:id="rId7"/>
-    <p:sldId id="269" r:id="rId8"/>
+    <p:sldId id="270" r:id="rId8"/>
+    <p:sldId id="271" r:id="rId9"/>
+    <p:sldId id="269" r:id="rId10"/>
   </p:sldIdLst>
   <p:sldSz cx="12192000" cy="6858000"/>
   <p:notesSz cx="6858000" cy="9144000"/>
@@ -231,7 +233,7 @@
             <a:pPr rtl="0"/>
             <a:fld id="{1CD784F2-097A-4060-8FF3-6FB91EC3D7DB}" type="datetime1">
               <a:rPr lang="fr-FR" smtClean="0"/>
-              <a:t>04/06/2026</a:t>
+              <a:t>06/06/2026</a:t>
             </a:fld>
             <a:endParaRPr lang="fr-FR"/>
           </a:p>
@@ -413,7 +415,7 @@
             <a:pPr rtl="0"/>
             <a:fld id="{6BF86344-02EE-4788-B238-DABD819F9A49}" type="datetime1">
               <a:rPr lang="fr-FR" noProof="0" smtClean="0"/>
-              <a:t>04/06/2026</a:t>
+              <a:t>06/06/2026</a:t>
             </a:fld>
             <a:endParaRPr lang="fr-FR" noProof="0"/>
           </a:p>
@@ -1037,7 +1039,7 @@
             <a:pPr rtl="0"/>
             <a:fld id="{1734D747-9380-41EE-9946-EC9EC0CA5D1E}" type="slidenum">
               <a:rPr lang="fr-FR" smtClean="0"/>
-              <a:t>4</a:t>
+              <a:t>6</a:t>
             </a:fld>
             <a:endParaRPr lang="fr-FR"/>
           </a:p>
@@ -25042,7 +25044,12 @@
             <p:ph type="title"/>
           </p:nvPr>
         </p:nvSpPr>
-        <p:spPr/>
+        <p:spPr>
+          <a:xfrm>
+            <a:off x="444500" y="407753"/>
+            <a:ext cx="11214100" cy="535531"/>
+          </a:xfrm>
+        </p:spPr>
         <p:txBody>
           <a:bodyPr rtlCol="0"/>
           <a:lstStyle/>
@@ -25050,7 +25057,7 @@
             <a:pPr rtl="0"/>
             <a:r>
               <a:rPr lang="fr-FR" dirty="0"/>
-              <a:t>Diagrammes</a:t>
+              <a:t>1) Diagrammes</a:t>
             </a:r>
           </a:p>
         </p:txBody>
@@ -25128,6 +25135,66 @@
           </a:p>
         </p:txBody>
       </p:sp>
+      <p:pic>
+        <p:nvPicPr>
+          <p:cNvPr id="6" name="Image 5">
+            <a:extLst>
+              <a:ext uri="{FF2B5EF4-FFF2-40B4-BE49-F238E27FC236}">
+                <a16:creationId xmlns:a16="http://schemas.microsoft.com/office/drawing/2014/main" id="{F0CB3B44-A56A-0F84-A876-1C7B1AB2AA83}"/>
+              </a:ext>
+            </a:extLst>
+          </p:cNvPr>
+          <p:cNvPicPr>
+            <a:picLocks noChangeAspect="1"/>
+          </p:cNvPicPr>
+          <p:nvPr/>
+        </p:nvPicPr>
+        <p:blipFill>
+          <a:blip r:embed="rId3"/>
+          <a:stretch>
+            <a:fillRect/>
+          </a:stretch>
+        </p:blipFill>
+        <p:spPr>
+          <a:xfrm>
+            <a:off x="322081" y="2153576"/>
+            <a:ext cx="5763582" cy="3563412"/>
+          </a:xfrm>
+          <a:prstGeom prst="rect">
+            <a:avLst/>
+          </a:prstGeom>
+        </p:spPr>
+      </p:pic>
+      <p:pic>
+        <p:nvPicPr>
+          <p:cNvPr id="8" name="Image 7">
+            <a:extLst>
+              <a:ext uri="{FF2B5EF4-FFF2-40B4-BE49-F238E27FC236}">
+                <a16:creationId xmlns:a16="http://schemas.microsoft.com/office/drawing/2014/main" id="{3BCA75F0-5A8C-AF43-B863-D4F1B50E74D8}"/>
+              </a:ext>
+            </a:extLst>
+          </p:cNvPr>
+          <p:cNvPicPr>
+            <a:picLocks noChangeAspect="1"/>
+          </p:cNvPicPr>
+          <p:nvPr/>
+        </p:nvPicPr>
+        <p:blipFill>
+          <a:blip r:embed="rId4"/>
+          <a:stretch>
+            <a:fillRect/>
+          </a:stretch>
+        </p:blipFill>
+        <p:spPr>
+          <a:xfrm>
+            <a:off x="6242784" y="2152560"/>
+            <a:ext cx="5763582" cy="3564428"/>
+          </a:xfrm>
+          <a:prstGeom prst="rect">
+            <a:avLst/>
+          </a:prstGeom>
+        </p:spPr>
+      </p:pic>
     </p:spTree>
     <p:extLst>
       <p:ext uri="{BB962C8B-B14F-4D97-AF65-F5344CB8AC3E}">
@@ -25154,6 +25221,271 @@
 </file>
 
 <file path=ppt/slides/slide4.xml><?xml version="1.0" encoding="utf-8"?>
+<p:sld xmlns:a="http://schemas.openxmlformats.org/drawingml/2006/main" xmlns:r="http://schemas.openxmlformats.org/officeDocument/2006/relationships" xmlns:p="http://schemas.openxmlformats.org/presentationml/2006/main">
+  <p:cSld>
+    <p:spTree>
+      <p:nvGrpSpPr>
+        <p:cNvPr id="1" name=""/>
+        <p:cNvGrpSpPr/>
+        <p:nvPr/>
+      </p:nvGrpSpPr>
+      <p:grpSpPr>
+        <a:xfrm>
+          <a:off x="0" y="0"/>
+          <a:ext cx="0" cy="0"/>
+          <a:chOff x="0" y="0"/>
+          <a:chExt cx="0" cy="0"/>
+        </a:xfrm>
+      </p:grpSpPr>
+      <p:sp>
+        <p:nvSpPr>
+          <p:cNvPr id="4" name="Titre 3">
+            <a:extLst>
+              <a:ext uri="{FF2B5EF4-FFF2-40B4-BE49-F238E27FC236}">
+                <a16:creationId xmlns:a16="http://schemas.microsoft.com/office/drawing/2014/main" id="{220A0403-F08D-4CDF-ACFF-5C7793B1D21E}"/>
+              </a:ext>
+            </a:extLst>
+          </p:cNvPr>
+          <p:cNvSpPr>
+            <a:spLocks noGrp="1"/>
+          </p:cNvSpPr>
+          <p:nvPr>
+            <p:ph type="title"/>
+          </p:nvPr>
+        </p:nvSpPr>
+        <p:spPr>
+          <a:xfrm>
+            <a:off x="444500" y="542925"/>
+            <a:ext cx="11214100" cy="535531"/>
+          </a:xfrm>
+        </p:spPr>
+        <p:txBody>
+          <a:bodyPr/>
+          <a:lstStyle/>
+          <a:p>
+            <a:r>
+              <a:rPr lang="fr-FR" dirty="0"/>
+              <a:t>Mesure et calcul de la tension</a:t>
+            </a:r>
+          </a:p>
+        </p:txBody>
+      </p:sp>
+      <p:sp>
+        <p:nvSpPr>
+          <p:cNvPr id="3" name="Espace réservé du numéro de diapositive 2">
+            <a:extLst>
+              <a:ext uri="{FF2B5EF4-FFF2-40B4-BE49-F238E27FC236}">
+                <a16:creationId xmlns:a16="http://schemas.microsoft.com/office/drawing/2014/main" id="{622B0D8D-84B3-689B-3AF0-4CEC6454B184}"/>
+              </a:ext>
+            </a:extLst>
+          </p:cNvPr>
+          <p:cNvSpPr>
+            <a:spLocks noGrp="1"/>
+          </p:cNvSpPr>
+          <p:nvPr>
+            <p:ph type="sldNum" sz="quarter" idx="12"/>
+          </p:nvPr>
+        </p:nvSpPr>
+        <p:spPr/>
+        <p:txBody>
+          <a:bodyPr/>
+          <a:lstStyle/>
+          <a:p>
+            <a:pPr rtl="0"/>
+            <a:fld id="{C263D6C4-4840-40CC-AC84-17E24B3B7BDE}" type="slidenum">
+              <a:rPr lang="fr-FR" noProof="0" smtClean="0"/>
+              <a:pPr rtl="0"/>
+              <a:t>4</a:t>
+            </a:fld>
+            <a:endParaRPr lang="fr-FR" noProof="0"/>
+          </a:p>
+        </p:txBody>
+      </p:sp>
+      <p:sp>
+        <p:nvSpPr>
+          <p:cNvPr id="5" name="Espace réservé du texte 4">
+            <a:extLst>
+              <a:ext uri="{FF2B5EF4-FFF2-40B4-BE49-F238E27FC236}">
+                <a16:creationId xmlns:a16="http://schemas.microsoft.com/office/drawing/2014/main" id="{E22FD2FC-3598-3892-6CA0-0CDF8163C827}"/>
+              </a:ext>
+            </a:extLst>
+          </p:cNvPr>
+          <p:cNvSpPr>
+            <a:spLocks noGrp="1"/>
+          </p:cNvSpPr>
+          <p:nvPr>
+            <p:ph type="body" sz="quarter" idx="13"/>
+          </p:nvPr>
+        </p:nvSpPr>
+        <p:spPr/>
+        <p:txBody>
+          <a:bodyPr/>
+          <a:lstStyle/>
+          <a:p>
+            <a:endParaRPr lang="fr-FR" dirty="0"/>
+          </a:p>
+        </p:txBody>
+      </p:sp>
+      <p:pic>
+        <p:nvPicPr>
+          <p:cNvPr id="7" name="Image 6">
+            <a:extLst>
+              <a:ext uri="{FF2B5EF4-FFF2-40B4-BE49-F238E27FC236}">
+                <a16:creationId xmlns:a16="http://schemas.microsoft.com/office/drawing/2014/main" id="{DFA08E4F-2198-6352-BD9B-F4C95DF52F42}"/>
+              </a:ext>
+            </a:extLst>
+          </p:cNvPr>
+          <p:cNvPicPr>
+            <a:picLocks noChangeAspect="1"/>
+          </p:cNvPicPr>
+          <p:nvPr/>
+        </p:nvPicPr>
+        <p:blipFill>
+          <a:blip r:embed="rId2"/>
+          <a:stretch>
+            <a:fillRect/>
+          </a:stretch>
+        </p:blipFill>
+        <p:spPr>
+          <a:xfrm>
+            <a:off x="6051550" y="1235900"/>
+            <a:ext cx="5811856" cy="2436585"/>
+          </a:xfrm>
+          <a:prstGeom prst="rect">
+            <a:avLst/>
+          </a:prstGeom>
+        </p:spPr>
+      </p:pic>
+      <p:pic>
+        <p:nvPicPr>
+          <p:cNvPr id="9" name="Image 8">
+            <a:extLst>
+              <a:ext uri="{FF2B5EF4-FFF2-40B4-BE49-F238E27FC236}">
+                <a16:creationId xmlns:a16="http://schemas.microsoft.com/office/drawing/2014/main" id="{EDD25736-22D6-C9FE-628C-510103EC00D4}"/>
+              </a:ext>
+            </a:extLst>
+          </p:cNvPr>
+          <p:cNvPicPr>
+            <a:picLocks noChangeAspect="1"/>
+          </p:cNvPicPr>
+          <p:nvPr/>
+        </p:nvPicPr>
+        <p:blipFill>
+          <a:blip r:embed="rId3"/>
+          <a:stretch>
+            <a:fillRect/>
+          </a:stretch>
+        </p:blipFill>
+        <p:spPr>
+          <a:xfrm>
+            <a:off x="5500859" y="3709056"/>
+            <a:ext cx="6691141" cy="2496543"/>
+          </a:xfrm>
+          <a:prstGeom prst="rect">
+            <a:avLst/>
+          </a:prstGeom>
+        </p:spPr>
+      </p:pic>
+    </p:spTree>
+    <p:extLst>
+      <p:ext uri="{BB962C8B-B14F-4D97-AF65-F5344CB8AC3E}">
+        <p14:creationId xmlns:p14="http://schemas.microsoft.com/office/powerpoint/2010/main" val="337781193"/>
+      </p:ext>
+    </p:extLst>
+  </p:cSld>
+  <p:clrMapOvr>
+    <a:masterClrMapping/>
+  </p:clrMapOvr>
+</p:sld>
+</file>
+
+<file path=ppt/slides/slide5.xml><?xml version="1.0" encoding="utf-8"?>
+<p:sld xmlns:a="http://schemas.openxmlformats.org/drawingml/2006/main" xmlns:r="http://schemas.openxmlformats.org/officeDocument/2006/relationships" xmlns:p="http://schemas.openxmlformats.org/presentationml/2006/main">
+  <p:cSld>
+    <p:spTree>
+      <p:nvGrpSpPr>
+        <p:cNvPr id="1" name=""/>
+        <p:cNvGrpSpPr/>
+        <p:nvPr/>
+      </p:nvGrpSpPr>
+      <p:grpSpPr>
+        <a:xfrm>
+          <a:off x="0" y="0"/>
+          <a:ext cx="0" cy="0"/>
+          <a:chOff x="0" y="0"/>
+          <a:chExt cx="0" cy="0"/>
+        </a:xfrm>
+      </p:grpSpPr>
+      <p:sp>
+        <p:nvSpPr>
+          <p:cNvPr id="2" name="Titre 1">
+            <a:extLst>
+              <a:ext uri="{FF2B5EF4-FFF2-40B4-BE49-F238E27FC236}">
+                <a16:creationId xmlns:a16="http://schemas.microsoft.com/office/drawing/2014/main" id="{680A284B-B101-69AB-F2E8-9664291EF25C}"/>
+              </a:ext>
+            </a:extLst>
+          </p:cNvPr>
+          <p:cNvSpPr>
+            <a:spLocks noGrp="1"/>
+          </p:cNvSpPr>
+          <p:nvPr>
+            <p:ph type="title"/>
+          </p:nvPr>
+        </p:nvSpPr>
+        <p:spPr/>
+        <p:txBody>
+          <a:bodyPr/>
+          <a:lstStyle/>
+          <a:p>
+            <a:endParaRPr lang="fr-FR"/>
+          </a:p>
+        </p:txBody>
+      </p:sp>
+      <p:sp>
+        <p:nvSpPr>
+          <p:cNvPr id="3" name="Espace réservé du numéro de diapositive 2">
+            <a:extLst>
+              <a:ext uri="{FF2B5EF4-FFF2-40B4-BE49-F238E27FC236}">
+                <a16:creationId xmlns:a16="http://schemas.microsoft.com/office/drawing/2014/main" id="{0363D28B-1DD2-CC74-2F85-7B93C1A212F3}"/>
+              </a:ext>
+            </a:extLst>
+          </p:cNvPr>
+          <p:cNvSpPr>
+            <a:spLocks noGrp="1"/>
+          </p:cNvSpPr>
+          <p:nvPr>
+            <p:ph type="sldNum" sz="quarter" idx="12"/>
+          </p:nvPr>
+        </p:nvSpPr>
+        <p:spPr/>
+        <p:txBody>
+          <a:bodyPr/>
+          <a:lstStyle/>
+          <a:p>
+            <a:pPr rtl="0"/>
+            <a:fld id="{C263D6C4-4840-40CC-AC84-17E24B3B7BDE}" type="slidenum">
+              <a:rPr lang="fr-FR" noProof="0" smtClean="0"/>
+              <a:pPr rtl="0"/>
+              <a:t>5</a:t>
+            </a:fld>
+            <a:endParaRPr lang="fr-FR" noProof="0"/>
+          </a:p>
+        </p:txBody>
+      </p:sp>
+    </p:spTree>
+    <p:extLst>
+      <p:ext uri="{BB962C8B-B14F-4D97-AF65-F5344CB8AC3E}">
+        <p14:creationId xmlns:p14="http://schemas.microsoft.com/office/powerpoint/2010/main" val="171002066"/>
+      </p:ext>
+    </p:extLst>
+  </p:cSld>
+  <p:clrMapOvr>
+    <a:masterClrMapping/>
+  </p:clrMapOvr>
+</p:sld>
+</file>
+
+<file path=ppt/slides/slide6.xml><?xml version="1.0" encoding="utf-8"?>
 <p:sld xmlns:a="http://schemas.openxmlformats.org/drawingml/2006/main" xmlns:r="http://schemas.openxmlformats.org/officeDocument/2006/relationships" xmlns:p="http://schemas.openxmlformats.org/presentationml/2006/main">
   <p:cSld>
     <p:spTree>
@@ -26012,12 +26344,12 @@
 </file>
 
 <file path=customXml/item1.xml><?xml version="1.0" encoding="utf-8"?>
-<p:properties xmlns:p="http://schemas.microsoft.com/office/2006/metadata/properties" xmlns:xsi="http://www.w3.org/2001/XMLSchema-instance" xmlns:pc="http://schemas.microsoft.com/office/infopath/2007/PartnerControls">
-  <documentManagement>
-    <_ip_UnifiedCompliancePolicyUIAction xmlns="http://schemas.microsoft.com/sharepoint/v3" xsi:nil="true"/>
-    <_ip_UnifiedCompliancePolicyProperties xmlns="http://schemas.microsoft.com/sharepoint/v3" xsi:nil="true"/>
-  </documentManagement>
-</p:properties>
+<?mso-contentType ?>
+<FormTemplates xmlns="http://schemas.microsoft.com/sharepoint/v3/contenttype/forms">
+  <Display>DocumentLibraryForm</Display>
+  <Edit>DocumentLibraryForm</Edit>
+  <New>DocumentLibraryForm</New>
+</FormTemplates>
 </file>
 
 <file path=customXml/item2.xml><?xml version="1.0" encoding="utf-8"?>
@@ -26229,28 +26561,18 @@
 </file>
 
 <file path=customXml/item3.xml><?xml version="1.0" encoding="utf-8"?>
-<?mso-contentType ?>
-<FormTemplates xmlns="http://schemas.microsoft.com/sharepoint/v3/contenttype/forms">
-  <Display>DocumentLibraryForm</Display>
-  <Edit>DocumentLibraryForm</Edit>
-  <New>DocumentLibraryForm</New>
-</FormTemplates>
+<p:properties xmlns:p="http://schemas.microsoft.com/office/2006/metadata/properties" xmlns:xsi="http://www.w3.org/2001/XMLSchema-instance" xmlns:pc="http://schemas.microsoft.com/office/infopath/2007/PartnerControls">
+  <documentManagement>
+    <_ip_UnifiedCompliancePolicyUIAction xmlns="http://schemas.microsoft.com/sharepoint/v3" xsi:nil="true"/>
+    <_ip_UnifiedCompliancePolicyProperties xmlns="http://schemas.microsoft.com/sharepoint/v3" xsi:nil="true"/>
+  </documentManagement>
+</p:properties>
 </file>
 
 <file path=customXml/itemProps1.xml><?xml version="1.0" encoding="utf-8"?>
-<ds:datastoreItem xmlns:ds="http://schemas.openxmlformats.org/officeDocument/2006/customXml" ds:itemID="{F8992231-163D-4428-A2B8-DA1FE0274129}">
+<ds:datastoreItem xmlns:ds="http://schemas.openxmlformats.org/officeDocument/2006/customXml" ds:itemID="{8A95DE24-D6C3-4A00-9085-D9594C193AE1}">
   <ds:schemaRefs>
-    <ds:schemaRef ds:uri="http://schemas.microsoft.com/office/2006/metadata/properties"/>
-    <ds:schemaRef ds:uri="http://purl.org/dc/dcmitype/"/>
-    <ds:schemaRef ds:uri="http://schemas.microsoft.com/sharepoint/v3"/>
-    <ds:schemaRef ds:uri="http://purl.org/dc/elements/1.1/"/>
-    <ds:schemaRef ds:uri="http://schemas.openxmlformats.org/package/2006/metadata/core-properties"/>
-    <ds:schemaRef ds:uri="6dc4bcd6-49db-4c07-9060-8acfc67cef9f"/>
-    <ds:schemaRef ds:uri="http://schemas.microsoft.com/office/2006/documentManagement/types"/>
-    <ds:schemaRef ds:uri="http://schemas.microsoft.com/office/infopath/2007/PartnerControls"/>
-    <ds:schemaRef ds:uri="http://purl.org/dc/terms/"/>
-    <ds:schemaRef ds:uri="fb0879af-3eba-417a-a55a-ffe6dcd6ca77"/>
-    <ds:schemaRef ds:uri="http://www.w3.org/XML/1998/namespace"/>
+    <ds:schemaRef ds:uri="http://schemas.microsoft.com/sharepoint/v3/contenttype/forms"/>
   </ds:schemaRefs>
 </ds:datastoreItem>
 </file>
@@ -26276,9 +26598,19 @@
 </file>
 
 <file path=customXml/itemProps3.xml><?xml version="1.0" encoding="utf-8"?>
-<ds:datastoreItem xmlns:ds="http://schemas.openxmlformats.org/officeDocument/2006/customXml" ds:itemID="{8A95DE24-D6C3-4A00-9085-D9594C193AE1}">
+<ds:datastoreItem xmlns:ds="http://schemas.openxmlformats.org/officeDocument/2006/customXml" ds:itemID="{F8992231-163D-4428-A2B8-DA1FE0274129}">
   <ds:schemaRefs>
-    <ds:schemaRef ds:uri="http://schemas.microsoft.com/sharepoint/v3/contenttype/forms"/>
+    <ds:schemaRef ds:uri="http://schemas.microsoft.com/office/2006/metadata/properties"/>
+    <ds:schemaRef ds:uri="http://purl.org/dc/dcmitype/"/>
+    <ds:schemaRef ds:uri="http://schemas.microsoft.com/sharepoint/v3"/>
+    <ds:schemaRef ds:uri="http://purl.org/dc/elements/1.1/"/>
+    <ds:schemaRef ds:uri="http://schemas.openxmlformats.org/package/2006/metadata/core-properties"/>
+    <ds:schemaRef ds:uri="6dc4bcd6-49db-4c07-9060-8acfc67cef9f"/>
+    <ds:schemaRef ds:uri="http://schemas.microsoft.com/office/2006/documentManagement/types"/>
+    <ds:schemaRef ds:uri="http://schemas.microsoft.com/office/infopath/2007/PartnerControls"/>
+    <ds:schemaRef ds:uri="http://purl.org/dc/terms/"/>
+    <ds:schemaRef ds:uri="fb0879af-3eba-417a-a55a-ffe6dcd6ca77"/>
+    <ds:schemaRef ds:uri="http://www.w3.org/XML/1998/namespace"/>
   </ds:schemaRefs>
 </ds:datastoreItem>
 </file>